--- a/.lessons/58 Backend Product And Related Features/19 Product Variant- Create necessary files/1.pptx
+++ b/.lessons/58 Backend Product And Related Features/19 Product Variant- Create necessary files/1.pptx
@@ -6,8 +6,14 @@
   </p:sldMasterIdLst>
   <p:sldIdLst>
     <p:sldId id="413" r:id="rId2"/>
-    <p:sldId id="414" r:id="rId3"/>
-    <p:sldId id="400" r:id="rId4"/>
+    <p:sldId id="415" r:id="rId3"/>
+    <p:sldId id="416" r:id="rId4"/>
+    <p:sldId id="417" r:id="rId5"/>
+    <p:sldId id="418" r:id="rId6"/>
+    <p:sldId id="419" r:id="rId7"/>
+    <p:sldId id="420" r:id="rId8"/>
+    <p:sldId id="414" r:id="rId9"/>
+    <p:sldId id="400" r:id="rId10"/>
   </p:sldIdLst>
   <p:sldSz cx="12192000" cy="6858000"/>
   <p:notesSz cx="6858000" cy="9144000"/>
@@ -261,7 +267,7 @@
           <a:p>
             <a:fld id="{3E102D2E-813C-461C-9963-687A650C48C0}" type="datetimeFigureOut">
               <a:rPr lang="en-US" smtClean="0"/>
-              <a:t>6/26/2025</a:t>
+              <a:t>10/8/2025</a:t>
             </a:fld>
             <a:endParaRPr lang="en-US"/>
           </a:p>
@@ -459,7 +465,7 @@
           <a:p>
             <a:fld id="{3E102D2E-813C-461C-9963-687A650C48C0}" type="datetimeFigureOut">
               <a:rPr lang="en-US" smtClean="0"/>
-              <a:t>6/26/2025</a:t>
+              <a:t>10/8/2025</a:t>
             </a:fld>
             <a:endParaRPr lang="en-US"/>
           </a:p>
@@ -667,7 +673,7 @@
           <a:p>
             <a:fld id="{3E102D2E-813C-461C-9963-687A650C48C0}" type="datetimeFigureOut">
               <a:rPr lang="en-US" smtClean="0"/>
-              <a:t>6/26/2025</a:t>
+              <a:t>10/8/2025</a:t>
             </a:fld>
             <a:endParaRPr lang="en-US"/>
           </a:p>
@@ -865,7 +871,7 @@
           <a:p>
             <a:fld id="{3E102D2E-813C-461C-9963-687A650C48C0}" type="datetimeFigureOut">
               <a:rPr lang="en-US" smtClean="0"/>
-              <a:t>6/26/2025</a:t>
+              <a:t>10/8/2025</a:t>
             </a:fld>
             <a:endParaRPr lang="en-US"/>
           </a:p>
@@ -1140,7 +1146,7 @@
           <a:p>
             <a:fld id="{3E102D2E-813C-461C-9963-687A650C48C0}" type="datetimeFigureOut">
               <a:rPr lang="en-US" smtClean="0"/>
-              <a:t>6/26/2025</a:t>
+              <a:t>10/8/2025</a:t>
             </a:fld>
             <a:endParaRPr lang="en-US"/>
           </a:p>
@@ -1405,7 +1411,7 @@
           <a:p>
             <a:fld id="{3E102D2E-813C-461C-9963-687A650C48C0}" type="datetimeFigureOut">
               <a:rPr lang="en-US" smtClean="0"/>
-              <a:t>6/26/2025</a:t>
+              <a:t>10/8/2025</a:t>
             </a:fld>
             <a:endParaRPr lang="en-US"/>
           </a:p>
@@ -1817,7 +1823,7 @@
           <a:p>
             <a:fld id="{3E102D2E-813C-461C-9963-687A650C48C0}" type="datetimeFigureOut">
               <a:rPr lang="en-US" smtClean="0"/>
-              <a:t>6/26/2025</a:t>
+              <a:t>10/8/2025</a:t>
             </a:fld>
             <a:endParaRPr lang="en-US"/>
           </a:p>
@@ -1958,7 +1964,7 @@
           <a:p>
             <a:fld id="{3E102D2E-813C-461C-9963-687A650C48C0}" type="datetimeFigureOut">
               <a:rPr lang="en-US" smtClean="0"/>
-              <a:t>6/26/2025</a:t>
+              <a:t>10/8/2025</a:t>
             </a:fld>
             <a:endParaRPr lang="en-US"/>
           </a:p>
@@ -2071,7 +2077,7 @@
           <a:p>
             <a:fld id="{3E102D2E-813C-461C-9963-687A650C48C0}" type="datetimeFigureOut">
               <a:rPr lang="en-US" smtClean="0"/>
-              <a:t>6/26/2025</a:t>
+              <a:t>10/8/2025</a:t>
             </a:fld>
             <a:endParaRPr lang="en-US"/>
           </a:p>
@@ -2382,7 +2388,7 @@
           <a:p>
             <a:fld id="{3E102D2E-813C-461C-9963-687A650C48C0}" type="datetimeFigureOut">
               <a:rPr lang="en-US" smtClean="0"/>
-              <a:t>6/26/2025</a:t>
+              <a:t>10/8/2025</a:t>
             </a:fld>
             <a:endParaRPr lang="en-US"/>
           </a:p>
@@ -2670,7 +2676,7 @@
           <a:p>
             <a:fld id="{3E102D2E-813C-461C-9963-687A650C48C0}" type="datetimeFigureOut">
               <a:rPr lang="en-US" smtClean="0"/>
-              <a:t>6/26/2025</a:t>
+              <a:t>10/8/2025</a:t>
             </a:fld>
             <a:endParaRPr lang="en-US"/>
           </a:p>
@@ -2911,7 +2917,7 @@
           <a:p>
             <a:fld id="{3E102D2E-813C-461C-9963-687A650C48C0}" type="datetimeFigureOut">
               <a:rPr lang="en-US" smtClean="0"/>
-              <a:t>6/26/2025</a:t>
+              <a:t>10/8/2025</a:t>
             </a:fld>
             <a:endParaRPr lang="en-US"/>
           </a:p>
@@ -3369,7 +3375,7 @@
               <a:buNone/>
             </a:pPr>
             <a:r>
-              <a:rPr kumimoji="0" lang="en-US" altLang="en-US" sz="1300" b="0" i="0" u="none" strike="noStrike" cap="none" normalizeH="0" baseline="0">
+              <a:rPr kumimoji="0" lang="az-Latn-AZ" altLang="en-US" sz="1300" b="0" i="0" u="none" strike="noStrike" cap="none" normalizeH="0" baseline="0">
                 <a:ln>
                   <a:noFill/>
                 </a:ln>
@@ -3379,11 +3385,103 @@
                 <a:effectLst/>
                 <a:latin typeface="Arial" panose="020B0604020202020204" pitchFamily="34" charset="0"/>
               </a:rPr>
-              <a:t>.</a:t>
-            </a:r>
-          </a:p>
-        </p:txBody>
-      </p:sp>
+              <a:t>Bu dərs </a:t>
+            </a:r>
+            <a:r>
+              <a:rPr kumimoji="0" lang="az-Latn-AZ" altLang="en-US" sz="1300" b="1" i="0" u="none" strike="noStrike" cap="none" normalizeH="0" baseline="0">
+                <a:ln>
+                  <a:noFill/>
+                </a:ln>
+                <a:solidFill>
+                  <a:schemeClr val="tx1"/>
+                </a:solidFill>
+                <a:effectLst/>
+                <a:latin typeface="Arial" panose="020B0604020202020204" pitchFamily="34" charset="0"/>
+              </a:rPr>
+              <a:t>Product</a:t>
+            </a:r>
+            <a:r>
+              <a:rPr kumimoji="0" lang="az-Latn-AZ" altLang="en-US" sz="1300" b="0" i="0" u="none" strike="noStrike" cap="none" normalizeH="0" baseline="0">
+                <a:ln>
+                  <a:noFill/>
+                </a:ln>
+                <a:solidFill>
+                  <a:schemeClr val="tx1"/>
+                </a:solidFill>
+                <a:effectLst/>
+                <a:latin typeface="Arial" panose="020B0604020202020204" pitchFamily="34" charset="0"/>
+              </a:rPr>
+              <a:t> </a:t>
+            </a:r>
+            <a:r>
+              <a:rPr kumimoji="0" lang="az-Latn-AZ" altLang="en-US" sz="1300" b="0" i="1" u="none" strike="noStrike" cap="none" normalizeH="0" baseline="0">
+                <a:ln>
+                  <a:noFill/>
+                </a:ln>
+                <a:solidFill>
+                  <a:schemeClr val="tx1"/>
+                </a:solidFill>
+                <a:effectLst/>
+                <a:latin typeface="Arial" panose="020B0604020202020204" pitchFamily="34" charset="0"/>
+              </a:rPr>
+              <a:t>variantlarını</a:t>
+            </a:r>
+            <a:r>
+              <a:rPr kumimoji="0" lang="az-Latn-AZ" altLang="en-US" sz="1300" b="0" i="0" u="none" strike="noStrike" cap="none" normalizeH="0" baseline="0">
+                <a:ln>
+                  <a:noFill/>
+                </a:ln>
+                <a:solidFill>
+                  <a:schemeClr val="tx1"/>
+                </a:solidFill>
+                <a:effectLst/>
+                <a:latin typeface="Arial" panose="020B0604020202020204" pitchFamily="34" charset="0"/>
+              </a:rPr>
+              <a:t> yaradacağıq.</a:t>
+            </a:r>
+            <a:endParaRPr kumimoji="0" lang="en-US" altLang="en-US" sz="1300" b="0" i="0" u="none" strike="noStrike" cap="none" normalizeH="0" baseline="0">
+              <a:ln>
+                <a:noFill/>
+              </a:ln>
+              <a:solidFill>
+                <a:schemeClr val="tx1"/>
+              </a:solidFill>
+              <a:effectLst/>
+              <a:latin typeface="Arial" panose="020B0604020202020204" pitchFamily="34" charset="0"/>
+            </a:endParaRPr>
+          </a:p>
+        </p:txBody>
+      </p:sp>
+      <p:pic>
+        <p:nvPicPr>
+          <p:cNvPr id="4" name="Picture 3">
+            <a:extLst>
+              <a:ext uri="{FF2B5EF4-FFF2-40B4-BE49-F238E27FC236}">
+                <a16:creationId xmlns:a16="http://schemas.microsoft.com/office/drawing/2014/main" id="{791FF4C8-A9C6-88D8-CE9C-FCDA9F7564D9}"/>
+              </a:ext>
+            </a:extLst>
+          </p:cNvPr>
+          <p:cNvPicPr>
+            <a:picLocks noChangeAspect="1"/>
+          </p:cNvPicPr>
+          <p:nvPr/>
+        </p:nvPicPr>
+        <p:blipFill>
+          <a:blip r:embed="rId2"/>
+          <a:stretch>
+            <a:fillRect/>
+          </a:stretch>
+        </p:blipFill>
+        <p:spPr>
+          <a:xfrm>
+            <a:off x="737439" y="1828576"/>
+            <a:ext cx="10717121" cy="3200847"/>
+          </a:xfrm>
+          <a:prstGeom prst="rect">
+            <a:avLst/>
+          </a:prstGeom>
+        </p:spPr>
+      </p:pic>
     </p:spTree>
     <p:extLst>
       <p:ext uri="{BB962C8B-B14F-4D97-AF65-F5344CB8AC3E}">
@@ -3398,6 +3496,1040 @@
 </file>
 
 <file path=ppt/slides/slide2.xml><?xml version="1.0" encoding="utf-8"?>
+<p:sld xmlns:a="http://schemas.openxmlformats.org/drawingml/2006/main" xmlns:r="http://schemas.openxmlformats.org/officeDocument/2006/relationships" xmlns:p="http://schemas.openxmlformats.org/presentationml/2006/main">
+  <p:cSld>
+    <p:spTree>
+      <p:nvGrpSpPr>
+        <p:cNvPr id="1" name="">
+          <a:extLst>
+            <a:ext uri="{FF2B5EF4-FFF2-40B4-BE49-F238E27FC236}">
+              <a16:creationId xmlns:a16="http://schemas.microsoft.com/office/drawing/2014/main" id="{08AD6645-78A1-79CE-2F22-5BEF7B5C8F95}"/>
+            </a:ext>
+          </a:extLst>
+        </p:cNvPr>
+        <p:cNvGrpSpPr/>
+        <p:nvPr/>
+      </p:nvGrpSpPr>
+      <p:grpSpPr>
+        <a:xfrm>
+          <a:off x="0" y="0"/>
+          <a:ext cx="0" cy="0"/>
+          <a:chOff x="0" y="0"/>
+          <a:chExt cx="0" cy="0"/>
+        </a:xfrm>
+      </p:grpSpPr>
+      <p:sp>
+        <p:nvSpPr>
+          <p:cNvPr id="3" name="TextBox 2">
+            <a:extLst>
+              <a:ext uri="{FF2B5EF4-FFF2-40B4-BE49-F238E27FC236}">
+                <a16:creationId xmlns:a16="http://schemas.microsoft.com/office/drawing/2014/main" id="{8BFF94E8-FC83-AF46-BAD2-8E596668E141}"/>
+              </a:ext>
+            </a:extLst>
+          </p:cNvPr>
+          <p:cNvSpPr txBox="1"/>
+          <p:nvPr/>
+        </p:nvSpPr>
+        <p:spPr>
+          <a:xfrm>
+            <a:off x="217714" y="255046"/>
+            <a:ext cx="11756571" cy="355354"/>
+          </a:xfrm>
+          <a:prstGeom prst="rect">
+            <a:avLst/>
+          </a:prstGeom>
+          <a:noFill/>
+        </p:spPr>
+        <p:txBody>
+          <a:bodyPr wrap="square">
+            <a:spAutoFit/>
+          </a:bodyPr>
+          <a:lstStyle/>
+          <a:p>
+            <a:pPr>
+              <a:lnSpc>
+                <a:spcPct val="150000"/>
+              </a:lnSpc>
+              <a:buNone/>
+            </a:pPr>
+            <a:r>
+              <a:rPr lang="en-US" altLang="en-US" sz="1300" b="1">
+                <a:latin typeface="Arial" panose="020B0604020202020204" pitchFamily="34" charset="0"/>
+              </a:rPr>
+              <a:t>Product</a:t>
+            </a:r>
+            <a:r>
+              <a:rPr lang="en-US" altLang="en-US" sz="1300">
+                <a:latin typeface="Arial" panose="020B0604020202020204" pitchFamily="34" charset="0"/>
+              </a:rPr>
+              <a:t> </a:t>
+            </a:r>
+            <a:r>
+              <a:rPr lang="az-Latn-AZ" altLang="en-US" sz="1300">
+                <a:latin typeface="Arial" panose="020B0604020202020204" pitchFamily="34" charset="0"/>
+              </a:rPr>
+              <a:t>v</a:t>
+            </a:r>
+            <a:r>
+              <a:rPr lang="en-US" altLang="en-US" sz="1300">
+                <a:latin typeface="Arial" panose="020B0604020202020204" pitchFamily="34" charset="0"/>
+              </a:rPr>
+              <a:t>ariantlar</a:t>
+            </a:r>
+            <a:r>
+              <a:rPr lang="az-Latn-AZ" altLang="en-US" sz="1300">
+                <a:latin typeface="Arial" panose="020B0604020202020204" pitchFamily="34" charset="0"/>
+              </a:rPr>
+              <a:t>ını idarə etmək üçün </a:t>
+            </a:r>
+            <a:r>
+              <a:rPr lang="az-Latn-AZ" altLang="en-US" sz="1300" b="1">
+                <a:latin typeface="Arial" panose="020B0604020202020204" pitchFamily="34" charset="0"/>
+              </a:rPr>
+              <a:t>controller</a:t>
+            </a:r>
+            <a:r>
+              <a:rPr lang="az-Latn-AZ" altLang="en-US" sz="1300">
+                <a:latin typeface="Arial" panose="020B0604020202020204" pitchFamily="34" charset="0"/>
+              </a:rPr>
+              <a:t> əlavə edirik.</a:t>
+            </a:r>
+            <a:endParaRPr kumimoji="0" lang="en-US" altLang="en-US" sz="1300" b="0" i="0" u="none" strike="noStrike" cap="none" normalizeH="0" baseline="0">
+              <a:ln>
+                <a:noFill/>
+              </a:ln>
+              <a:solidFill>
+                <a:schemeClr val="tx1"/>
+              </a:solidFill>
+              <a:effectLst/>
+              <a:latin typeface="Arial" panose="020B0604020202020204" pitchFamily="34" charset="0"/>
+            </a:endParaRPr>
+          </a:p>
+        </p:txBody>
+      </p:sp>
+      <p:pic>
+        <p:nvPicPr>
+          <p:cNvPr id="4" name="Picture 3">
+            <a:extLst>
+              <a:ext uri="{FF2B5EF4-FFF2-40B4-BE49-F238E27FC236}">
+                <a16:creationId xmlns:a16="http://schemas.microsoft.com/office/drawing/2014/main" id="{15320744-8B15-D576-5FD2-A889957109F4}"/>
+              </a:ext>
+            </a:extLst>
+          </p:cNvPr>
+          <p:cNvPicPr>
+            <a:picLocks noChangeAspect="1"/>
+          </p:cNvPicPr>
+          <p:nvPr/>
+        </p:nvPicPr>
+        <p:blipFill>
+          <a:blip r:embed="rId2"/>
+          <a:stretch>
+            <a:fillRect/>
+          </a:stretch>
+        </p:blipFill>
+        <p:spPr>
+          <a:xfrm>
+            <a:off x="275411" y="1680918"/>
+            <a:ext cx="11641175" cy="3496163"/>
+          </a:xfrm>
+          <a:prstGeom prst="rect">
+            <a:avLst/>
+          </a:prstGeom>
+        </p:spPr>
+      </p:pic>
+    </p:spTree>
+    <p:extLst>
+      <p:ext uri="{BB962C8B-B14F-4D97-AF65-F5344CB8AC3E}">
+        <p14:creationId xmlns:p14="http://schemas.microsoft.com/office/powerpoint/2010/main" val="4267968729"/>
+      </p:ext>
+    </p:extLst>
+  </p:cSld>
+  <p:clrMapOvr>
+    <a:masterClrMapping/>
+  </p:clrMapOvr>
+</p:sld>
+</file>
+
+<file path=ppt/slides/slide3.xml><?xml version="1.0" encoding="utf-8"?>
+<p:sld xmlns:a="http://schemas.openxmlformats.org/drawingml/2006/main" xmlns:r="http://schemas.openxmlformats.org/officeDocument/2006/relationships" xmlns:p="http://schemas.openxmlformats.org/presentationml/2006/main">
+  <p:cSld>
+    <p:spTree>
+      <p:nvGrpSpPr>
+        <p:cNvPr id="1" name="">
+          <a:extLst>
+            <a:ext uri="{FF2B5EF4-FFF2-40B4-BE49-F238E27FC236}">
+              <a16:creationId xmlns:a16="http://schemas.microsoft.com/office/drawing/2014/main" id="{DF458C4C-8822-69D8-9F43-14A518654451}"/>
+            </a:ext>
+          </a:extLst>
+        </p:cNvPr>
+        <p:cNvGrpSpPr/>
+        <p:nvPr/>
+      </p:nvGrpSpPr>
+      <p:grpSpPr>
+        <a:xfrm>
+          <a:off x="0" y="0"/>
+          <a:ext cx="0" cy="0"/>
+          <a:chOff x="0" y="0"/>
+          <a:chExt cx="0" cy="0"/>
+        </a:xfrm>
+      </p:grpSpPr>
+      <p:sp>
+        <p:nvSpPr>
+          <p:cNvPr id="3" name="TextBox 2">
+            <a:extLst>
+              <a:ext uri="{FF2B5EF4-FFF2-40B4-BE49-F238E27FC236}">
+                <a16:creationId xmlns:a16="http://schemas.microsoft.com/office/drawing/2014/main" id="{A0FA5C55-B264-ACB4-1E28-1E7B58B68829}"/>
+              </a:ext>
+            </a:extLst>
+          </p:cNvPr>
+          <p:cNvSpPr txBox="1"/>
+          <p:nvPr/>
+        </p:nvSpPr>
+        <p:spPr>
+          <a:xfrm>
+            <a:off x="217714" y="255046"/>
+            <a:ext cx="11756571" cy="1443152"/>
+          </a:xfrm>
+          <a:prstGeom prst="rect">
+            <a:avLst/>
+          </a:prstGeom>
+          <a:noFill/>
+        </p:spPr>
+        <p:txBody>
+          <a:bodyPr wrap="square">
+            <a:spAutoFit/>
+          </a:bodyPr>
+          <a:lstStyle/>
+          <a:p>
+            <a:pPr>
+              <a:lnSpc>
+                <a:spcPct val="150000"/>
+              </a:lnSpc>
+              <a:buNone/>
+            </a:pPr>
+            <a:r>
+              <a:rPr lang="en-US" altLang="en-US" sz="1200" b="1">
+                <a:latin typeface="Arial" panose="020B0604020202020204" pitchFamily="34" charset="0"/>
+              </a:rPr>
+              <a:t>app\DataTables\ProductDataTable.php</a:t>
+            </a:r>
+            <a:endParaRPr lang="az-Latn-AZ" altLang="en-US" sz="1200" b="1">
+              <a:latin typeface="Arial" panose="020B0604020202020204" pitchFamily="34" charset="0"/>
+            </a:endParaRPr>
+          </a:p>
+          <a:p>
+            <a:pPr>
+              <a:lnSpc>
+                <a:spcPct val="150000"/>
+              </a:lnSpc>
+              <a:buNone/>
+            </a:pPr>
+            <a:endParaRPr kumimoji="0" lang="az-Latn-AZ" altLang="en-US" sz="1200" b="0" i="0" u="none" strike="noStrike" cap="none" normalizeH="0" baseline="0">
+              <a:ln>
+                <a:noFill/>
+              </a:ln>
+              <a:solidFill>
+                <a:schemeClr val="tx1"/>
+              </a:solidFill>
+              <a:effectLst/>
+              <a:latin typeface="Arial" panose="020B0604020202020204" pitchFamily="34" charset="0"/>
+            </a:endParaRPr>
+          </a:p>
+          <a:p>
+            <a:pPr>
+              <a:lnSpc>
+                <a:spcPct val="150000"/>
+              </a:lnSpc>
+              <a:buNone/>
+            </a:pPr>
+            <a:r>
+              <a:rPr lang="az-Latn-AZ" altLang="en-US" sz="1200">
+                <a:latin typeface="Arial" panose="020B0604020202020204" pitchFamily="34" charset="0"/>
+              </a:rPr>
+              <a:t>Variants düyməsi klikləndikdə, `</a:t>
+            </a:r>
+            <a:r>
+              <a:rPr lang="az-Latn-AZ" altLang="en-US" sz="1200" b="1">
+                <a:latin typeface="Arial" panose="020B0604020202020204" pitchFamily="34" charset="0"/>
+              </a:rPr>
+              <a:t>admin.products-variant.index</a:t>
+            </a:r>
+            <a:r>
+              <a:rPr lang="az-Latn-AZ" altLang="en-US" sz="1200">
+                <a:latin typeface="Arial" panose="020B0604020202020204" pitchFamily="34" charset="0"/>
+              </a:rPr>
+              <a:t>` routu, bizi `</a:t>
+            </a:r>
+            <a:r>
+              <a:rPr lang="az-Latn-AZ" altLang="en-US" sz="1200" b="1">
+                <a:latin typeface="Arial" panose="020B0604020202020204" pitchFamily="34" charset="0"/>
+              </a:rPr>
+              <a:t>ProductVariantController.php</a:t>
+            </a:r>
+            <a:r>
+              <a:rPr lang="az-Latn-AZ" altLang="en-US" sz="1200">
+                <a:latin typeface="Arial" panose="020B0604020202020204" pitchFamily="34" charset="0"/>
+              </a:rPr>
+              <a:t>` kontrollerin </a:t>
+            </a:r>
+            <a:r>
+              <a:rPr lang="az-Latn-AZ" altLang="en-US" sz="1200" b="1">
+                <a:latin typeface="Arial" panose="020B0604020202020204" pitchFamily="34" charset="0"/>
+              </a:rPr>
+              <a:t>index() </a:t>
+            </a:r>
+            <a:r>
+              <a:rPr lang="az-Latn-AZ" altLang="en-US" sz="1200">
+                <a:latin typeface="Arial" panose="020B0604020202020204" pitchFamily="34" charset="0"/>
+              </a:rPr>
+              <a:t>metodunda</a:t>
+            </a:r>
+          </a:p>
+          <a:p>
+            <a:pPr>
+              <a:lnSpc>
+                <a:spcPct val="150000"/>
+              </a:lnSpc>
+              <a:buNone/>
+            </a:pPr>
+            <a:r>
+              <a:rPr kumimoji="0" lang="az-Latn-AZ" altLang="en-US" sz="1200" b="0" i="0" u="none" strike="noStrike" cap="none" normalizeH="0" baseline="0">
+                <a:ln>
+                  <a:noFill/>
+                </a:ln>
+                <a:solidFill>
+                  <a:schemeClr val="tx1"/>
+                </a:solidFill>
+                <a:effectLst/>
+                <a:latin typeface="Arial" panose="020B0604020202020204" pitchFamily="34" charset="0"/>
+              </a:rPr>
+              <a:t>qeyd etd</a:t>
+            </a:r>
+            <a:r>
+              <a:rPr lang="az-Latn-AZ" altLang="en-US" sz="1200">
+                <a:latin typeface="Arial" panose="020B0604020202020204" pitchFamily="34" charset="0"/>
+              </a:rPr>
+              <a:t>iyimiz şablona yönləndirəcək və özü ilə sorğuda product identifikatorunu `</a:t>
+            </a:r>
+            <a:r>
+              <a:rPr lang="az-Latn-AZ" altLang="en-US" sz="1200" b="1">
+                <a:latin typeface="Arial" panose="020B0604020202020204" pitchFamily="34" charset="0"/>
+              </a:rPr>
+              <a:t>product</a:t>
+            </a:r>
+            <a:r>
+              <a:rPr lang="az-Latn-AZ" altLang="en-US" sz="1200">
+                <a:latin typeface="Arial" panose="020B0604020202020204" pitchFamily="34" charset="0"/>
+              </a:rPr>
+              <a:t>` adı ilə aparacaq.</a:t>
+            </a:r>
+          </a:p>
+          <a:p>
+            <a:pPr>
+              <a:lnSpc>
+                <a:spcPct val="150000"/>
+              </a:lnSpc>
+              <a:buNone/>
+            </a:pPr>
+            <a:endParaRPr kumimoji="0" lang="en-US" altLang="en-US" sz="1200" b="0" i="0" u="none" strike="noStrike" cap="none" normalizeH="0" baseline="0">
+              <a:ln>
+                <a:noFill/>
+              </a:ln>
+              <a:solidFill>
+                <a:schemeClr val="tx1"/>
+              </a:solidFill>
+              <a:effectLst/>
+              <a:latin typeface="Arial" panose="020B0604020202020204" pitchFamily="34" charset="0"/>
+            </a:endParaRPr>
+          </a:p>
+        </p:txBody>
+      </p:sp>
+      <p:pic>
+        <p:nvPicPr>
+          <p:cNvPr id="4" name="Picture 3">
+            <a:extLst>
+              <a:ext uri="{FF2B5EF4-FFF2-40B4-BE49-F238E27FC236}">
+                <a16:creationId xmlns:a16="http://schemas.microsoft.com/office/drawing/2014/main" id="{A4EE0ED4-43B0-F4B7-6DD8-4F3819F81417}"/>
+              </a:ext>
+            </a:extLst>
+          </p:cNvPr>
+          <p:cNvPicPr>
+            <a:picLocks noChangeAspect="1"/>
+          </p:cNvPicPr>
+          <p:nvPr/>
+        </p:nvPicPr>
+        <p:blipFill>
+          <a:blip r:embed="rId2"/>
+          <a:stretch>
+            <a:fillRect/>
+          </a:stretch>
+        </p:blipFill>
+        <p:spPr>
+          <a:xfrm>
+            <a:off x="3971636" y="1904958"/>
+            <a:ext cx="8220364" cy="4953042"/>
+          </a:xfrm>
+          <a:prstGeom prst="rect">
+            <a:avLst/>
+          </a:prstGeom>
+        </p:spPr>
+      </p:pic>
+      <p:pic>
+        <p:nvPicPr>
+          <p:cNvPr id="6" name="Picture 5">
+            <a:extLst>
+              <a:ext uri="{FF2B5EF4-FFF2-40B4-BE49-F238E27FC236}">
+                <a16:creationId xmlns:a16="http://schemas.microsoft.com/office/drawing/2014/main" id="{88D310CD-50DC-D000-5A3D-D56F745F797B}"/>
+              </a:ext>
+            </a:extLst>
+          </p:cNvPr>
+          <p:cNvPicPr>
+            <a:picLocks noChangeAspect="1"/>
+          </p:cNvPicPr>
+          <p:nvPr/>
+        </p:nvPicPr>
+        <p:blipFill>
+          <a:blip r:embed="rId3"/>
+          <a:stretch>
+            <a:fillRect/>
+          </a:stretch>
+        </p:blipFill>
+        <p:spPr>
+          <a:xfrm>
+            <a:off x="10469871" y="92176"/>
+            <a:ext cx="1633723" cy="1036448"/>
+          </a:xfrm>
+          <a:prstGeom prst="rect">
+            <a:avLst/>
+          </a:prstGeom>
+          <a:ln>
+            <a:noFill/>
+          </a:ln>
+          <a:effectLst>
+            <a:outerShdw blurRad="292100" dist="139700" dir="2700000" algn="tl" rotWithShape="0">
+              <a:srgbClr val="333333">
+                <a:alpha val="65000"/>
+              </a:srgbClr>
+            </a:outerShdw>
+          </a:effectLst>
+        </p:spPr>
+      </p:pic>
+    </p:spTree>
+    <p:extLst>
+      <p:ext uri="{BB962C8B-B14F-4D97-AF65-F5344CB8AC3E}">
+        <p14:creationId xmlns:p14="http://schemas.microsoft.com/office/powerpoint/2010/main" val="3902433110"/>
+      </p:ext>
+    </p:extLst>
+  </p:cSld>
+  <p:clrMapOvr>
+    <a:masterClrMapping/>
+  </p:clrMapOvr>
+</p:sld>
+</file>
+
+<file path=ppt/slides/slide4.xml><?xml version="1.0" encoding="utf-8"?>
+<p:sld xmlns:a="http://schemas.openxmlformats.org/drawingml/2006/main" xmlns:r="http://schemas.openxmlformats.org/officeDocument/2006/relationships" xmlns:p="http://schemas.openxmlformats.org/presentationml/2006/main">
+  <p:cSld>
+    <p:spTree>
+      <p:nvGrpSpPr>
+        <p:cNvPr id="1" name="">
+          <a:extLst>
+            <a:ext uri="{FF2B5EF4-FFF2-40B4-BE49-F238E27FC236}">
+              <a16:creationId xmlns:a16="http://schemas.microsoft.com/office/drawing/2014/main" id="{98120D70-07E5-ED64-7A5A-0FED2E73FED3}"/>
+            </a:ext>
+          </a:extLst>
+        </p:cNvPr>
+        <p:cNvGrpSpPr/>
+        <p:nvPr/>
+      </p:nvGrpSpPr>
+      <p:grpSpPr>
+        <a:xfrm>
+          <a:off x="0" y="0"/>
+          <a:ext cx="0" cy="0"/>
+          <a:chOff x="0" y="0"/>
+          <a:chExt cx="0" cy="0"/>
+        </a:xfrm>
+      </p:grpSpPr>
+      <p:sp>
+        <p:nvSpPr>
+          <p:cNvPr id="3" name="TextBox 2">
+            <a:extLst>
+              <a:ext uri="{FF2B5EF4-FFF2-40B4-BE49-F238E27FC236}">
+                <a16:creationId xmlns:a16="http://schemas.microsoft.com/office/drawing/2014/main" id="{43E500E3-6FFE-D0C6-04E0-B4357E274180}"/>
+              </a:ext>
+            </a:extLst>
+          </p:cNvPr>
+          <p:cNvSpPr txBox="1"/>
+          <p:nvPr/>
+        </p:nvSpPr>
+        <p:spPr>
+          <a:xfrm>
+            <a:off x="217714" y="255046"/>
+            <a:ext cx="11756571" cy="355354"/>
+          </a:xfrm>
+          <a:prstGeom prst="rect">
+            <a:avLst/>
+          </a:prstGeom>
+          <a:noFill/>
+        </p:spPr>
+        <p:txBody>
+          <a:bodyPr wrap="square">
+            <a:spAutoFit/>
+          </a:bodyPr>
+          <a:lstStyle/>
+          <a:p>
+            <a:pPr>
+              <a:lnSpc>
+                <a:spcPct val="150000"/>
+              </a:lnSpc>
+              <a:buNone/>
+            </a:pPr>
+            <a:r>
+              <a:rPr kumimoji="0" lang="en-US" altLang="en-US" sz="1300" b="0" i="0" u="none" strike="noStrike" cap="none" normalizeH="0" baseline="0">
+                <a:ln>
+                  <a:noFill/>
+                </a:ln>
+                <a:solidFill>
+                  <a:schemeClr val="tx1"/>
+                </a:solidFill>
+                <a:effectLst/>
+                <a:latin typeface="Arial" panose="020B0604020202020204" pitchFamily="34" charset="0"/>
+              </a:rPr>
+              <a:t>Product </a:t>
+            </a:r>
+            <a:r>
+              <a:rPr kumimoji="0" lang="az-Latn-AZ" altLang="en-US" sz="1300" b="0" i="0" u="none" strike="noStrike" cap="none" normalizeH="0" baseline="0">
+                <a:ln>
+                  <a:noFill/>
+                </a:ln>
+                <a:solidFill>
+                  <a:schemeClr val="tx1"/>
+                </a:solidFill>
+                <a:effectLst/>
+                <a:latin typeface="Arial" panose="020B0604020202020204" pitchFamily="34" charset="0"/>
+              </a:rPr>
+              <a:t>Variant üçün şablon fayllarımızı yaradırıq.</a:t>
+            </a:r>
+            <a:endParaRPr kumimoji="0" lang="en-US" altLang="en-US" sz="1300" b="0" i="0" u="none" strike="noStrike" cap="none" normalizeH="0" baseline="0">
+              <a:ln>
+                <a:noFill/>
+              </a:ln>
+              <a:solidFill>
+                <a:schemeClr val="tx1"/>
+              </a:solidFill>
+              <a:effectLst/>
+              <a:latin typeface="Arial" panose="020B0604020202020204" pitchFamily="34" charset="0"/>
+            </a:endParaRPr>
+          </a:p>
+        </p:txBody>
+      </p:sp>
+      <p:pic>
+        <p:nvPicPr>
+          <p:cNvPr id="6" name="Picture 5">
+            <a:extLst>
+              <a:ext uri="{FF2B5EF4-FFF2-40B4-BE49-F238E27FC236}">
+                <a16:creationId xmlns:a16="http://schemas.microsoft.com/office/drawing/2014/main" id="{E3FC53A2-3EBC-03D3-D770-5C1C09F82998}"/>
+              </a:ext>
+            </a:extLst>
+          </p:cNvPr>
+          <p:cNvPicPr>
+            <a:picLocks noChangeAspect="1"/>
+          </p:cNvPicPr>
+          <p:nvPr/>
+        </p:nvPicPr>
+        <p:blipFill>
+          <a:blip r:embed="rId2"/>
+          <a:stretch>
+            <a:fillRect/>
+          </a:stretch>
+        </p:blipFill>
+        <p:spPr>
+          <a:xfrm>
+            <a:off x="10018541" y="0"/>
+            <a:ext cx="2173459" cy="6858000"/>
+          </a:xfrm>
+          <a:prstGeom prst="rect">
+            <a:avLst/>
+          </a:prstGeom>
+        </p:spPr>
+      </p:pic>
+    </p:spTree>
+    <p:extLst>
+      <p:ext uri="{BB962C8B-B14F-4D97-AF65-F5344CB8AC3E}">
+        <p14:creationId xmlns:p14="http://schemas.microsoft.com/office/powerpoint/2010/main" val="3916440596"/>
+      </p:ext>
+    </p:extLst>
+  </p:cSld>
+  <p:clrMapOvr>
+    <a:masterClrMapping/>
+  </p:clrMapOvr>
+</p:sld>
+</file>
+
+<file path=ppt/slides/slide5.xml><?xml version="1.0" encoding="utf-8"?>
+<p:sld xmlns:a="http://schemas.openxmlformats.org/drawingml/2006/main" xmlns:r="http://schemas.openxmlformats.org/officeDocument/2006/relationships" xmlns:p="http://schemas.openxmlformats.org/presentationml/2006/main">
+  <p:cSld>
+    <p:spTree>
+      <p:nvGrpSpPr>
+        <p:cNvPr id="1" name="">
+          <a:extLst>
+            <a:ext uri="{FF2B5EF4-FFF2-40B4-BE49-F238E27FC236}">
+              <a16:creationId xmlns:a16="http://schemas.microsoft.com/office/drawing/2014/main" id="{D3FC111B-95FC-95BA-ADFB-0EF55213E27F}"/>
+            </a:ext>
+          </a:extLst>
+        </p:cNvPr>
+        <p:cNvGrpSpPr/>
+        <p:nvPr/>
+      </p:nvGrpSpPr>
+      <p:grpSpPr>
+        <a:xfrm>
+          <a:off x="0" y="0"/>
+          <a:ext cx="0" cy="0"/>
+          <a:chOff x="0" y="0"/>
+          <a:chExt cx="0" cy="0"/>
+        </a:xfrm>
+      </p:grpSpPr>
+      <p:sp>
+        <p:nvSpPr>
+          <p:cNvPr id="3" name="TextBox 2">
+            <a:extLst>
+              <a:ext uri="{FF2B5EF4-FFF2-40B4-BE49-F238E27FC236}">
+                <a16:creationId xmlns:a16="http://schemas.microsoft.com/office/drawing/2014/main" id="{6E8A1716-7DE4-A70F-0F45-5A43F06B6318}"/>
+              </a:ext>
+            </a:extLst>
+          </p:cNvPr>
+          <p:cNvSpPr txBox="1"/>
+          <p:nvPr/>
+        </p:nvSpPr>
+        <p:spPr>
+          <a:xfrm>
+            <a:off x="217714" y="255046"/>
+            <a:ext cx="11756571" cy="355354"/>
+          </a:xfrm>
+          <a:prstGeom prst="rect">
+            <a:avLst/>
+          </a:prstGeom>
+          <a:noFill/>
+        </p:spPr>
+        <p:txBody>
+          <a:bodyPr wrap="square">
+            <a:spAutoFit/>
+          </a:bodyPr>
+          <a:lstStyle/>
+          <a:p>
+            <a:pPr>
+              <a:lnSpc>
+                <a:spcPct val="150000"/>
+              </a:lnSpc>
+              <a:buNone/>
+            </a:pPr>
+            <a:r>
+              <a:rPr lang="en-US" altLang="en-US" sz="1300">
+                <a:latin typeface="Arial" panose="020B0604020202020204" pitchFamily="34" charset="0"/>
+              </a:rPr>
+              <a:t>resources\views\admin\product\</a:t>
+            </a:r>
+            <a:r>
+              <a:rPr lang="en-US" altLang="en-US" sz="1300" b="1">
+                <a:latin typeface="Arial" panose="020B0604020202020204" pitchFamily="34" charset="0"/>
+              </a:rPr>
+              <a:t>product-variant\index.blade.php</a:t>
+            </a:r>
+            <a:endParaRPr kumimoji="0" lang="en-US" altLang="en-US" sz="1300" b="1" i="0" u="none" strike="noStrike" cap="none" normalizeH="0" baseline="0">
+              <a:ln>
+                <a:noFill/>
+              </a:ln>
+              <a:solidFill>
+                <a:schemeClr val="tx1"/>
+              </a:solidFill>
+              <a:effectLst/>
+              <a:latin typeface="Arial" panose="020B0604020202020204" pitchFamily="34" charset="0"/>
+            </a:endParaRPr>
+          </a:p>
+        </p:txBody>
+      </p:sp>
+      <p:pic>
+        <p:nvPicPr>
+          <p:cNvPr id="4" name="Picture 3">
+            <a:extLst>
+              <a:ext uri="{FF2B5EF4-FFF2-40B4-BE49-F238E27FC236}">
+                <a16:creationId xmlns:a16="http://schemas.microsoft.com/office/drawing/2014/main" id="{DC4BEA90-FC61-6D31-9E59-71A729B18250}"/>
+              </a:ext>
+            </a:extLst>
+          </p:cNvPr>
+          <p:cNvPicPr>
+            <a:picLocks noChangeAspect="1"/>
+          </p:cNvPicPr>
+          <p:nvPr/>
+        </p:nvPicPr>
+        <p:blipFill>
+          <a:blip r:embed="rId2"/>
+          <a:stretch>
+            <a:fillRect/>
+          </a:stretch>
+        </p:blipFill>
+        <p:spPr>
+          <a:xfrm>
+            <a:off x="2497116" y="1440873"/>
+            <a:ext cx="9694883" cy="5417127"/>
+          </a:xfrm>
+          <a:prstGeom prst="rect">
+            <a:avLst/>
+          </a:prstGeom>
+        </p:spPr>
+      </p:pic>
+    </p:spTree>
+    <p:extLst>
+      <p:ext uri="{BB962C8B-B14F-4D97-AF65-F5344CB8AC3E}">
+        <p14:creationId xmlns:p14="http://schemas.microsoft.com/office/powerpoint/2010/main" val="1607430471"/>
+      </p:ext>
+    </p:extLst>
+  </p:cSld>
+  <p:clrMapOvr>
+    <a:masterClrMapping/>
+  </p:clrMapOvr>
+</p:sld>
+</file>
+
+<file path=ppt/slides/slide6.xml><?xml version="1.0" encoding="utf-8"?>
+<p:sld xmlns:a="http://schemas.openxmlformats.org/drawingml/2006/main" xmlns:r="http://schemas.openxmlformats.org/officeDocument/2006/relationships" xmlns:p="http://schemas.openxmlformats.org/presentationml/2006/main">
+  <p:cSld>
+    <p:spTree>
+      <p:nvGrpSpPr>
+        <p:cNvPr id="1" name="">
+          <a:extLst>
+            <a:ext uri="{FF2B5EF4-FFF2-40B4-BE49-F238E27FC236}">
+              <a16:creationId xmlns:a16="http://schemas.microsoft.com/office/drawing/2014/main" id="{DF77887D-BD01-488B-B977-D92D266303C9}"/>
+            </a:ext>
+          </a:extLst>
+        </p:cNvPr>
+        <p:cNvGrpSpPr/>
+        <p:nvPr/>
+      </p:nvGrpSpPr>
+      <p:grpSpPr>
+        <a:xfrm>
+          <a:off x="0" y="0"/>
+          <a:ext cx="0" cy="0"/>
+          <a:chOff x="0" y="0"/>
+          <a:chExt cx="0" cy="0"/>
+        </a:xfrm>
+      </p:grpSpPr>
+      <p:sp>
+        <p:nvSpPr>
+          <p:cNvPr id="3" name="TextBox 2">
+            <a:extLst>
+              <a:ext uri="{FF2B5EF4-FFF2-40B4-BE49-F238E27FC236}">
+                <a16:creationId xmlns:a16="http://schemas.microsoft.com/office/drawing/2014/main" id="{99CEAE05-F956-BE58-3AB3-8B0761C4AB02}"/>
+              </a:ext>
+            </a:extLst>
+          </p:cNvPr>
+          <p:cNvSpPr txBox="1"/>
+          <p:nvPr/>
+        </p:nvSpPr>
+        <p:spPr>
+          <a:xfrm>
+            <a:off x="0" y="199628"/>
+            <a:ext cx="11756571" cy="1855764"/>
+          </a:xfrm>
+          <a:prstGeom prst="rect">
+            <a:avLst/>
+          </a:prstGeom>
+          <a:noFill/>
+        </p:spPr>
+        <p:txBody>
+          <a:bodyPr wrap="square">
+            <a:spAutoFit/>
+          </a:bodyPr>
+          <a:lstStyle/>
+          <a:p>
+            <a:pPr>
+              <a:lnSpc>
+                <a:spcPct val="150000"/>
+              </a:lnSpc>
+              <a:buNone/>
+            </a:pPr>
+            <a:r>
+              <a:rPr lang="en-US" altLang="en-US" sz="1300">
+                <a:latin typeface="Arial" panose="020B0604020202020204" pitchFamily="34" charset="0"/>
+              </a:rPr>
+              <a:t>resources\views\admin\product\</a:t>
+            </a:r>
+            <a:r>
+              <a:rPr lang="en-US" altLang="en-US" sz="1300" b="1">
+                <a:latin typeface="Arial" panose="020B0604020202020204" pitchFamily="34" charset="0"/>
+              </a:rPr>
+              <a:t>product-variant\index.blade.php</a:t>
+            </a:r>
+            <a:endParaRPr lang="az-Latn-AZ" altLang="en-US" sz="1300" b="1">
+              <a:latin typeface="Arial" panose="020B0604020202020204" pitchFamily="34" charset="0"/>
+            </a:endParaRPr>
+          </a:p>
+          <a:p>
+            <a:pPr>
+              <a:lnSpc>
+                <a:spcPct val="150000"/>
+              </a:lnSpc>
+              <a:buNone/>
+            </a:pPr>
+            <a:endParaRPr kumimoji="0" lang="az-Latn-AZ" altLang="en-US" sz="1300" b="0" i="0" u="none" strike="noStrike" cap="none" normalizeH="0" baseline="0">
+              <a:ln>
+                <a:noFill/>
+              </a:ln>
+              <a:solidFill>
+                <a:schemeClr val="tx1"/>
+              </a:solidFill>
+              <a:effectLst/>
+              <a:latin typeface="Arial" panose="020B0604020202020204" pitchFamily="34" charset="0"/>
+            </a:endParaRPr>
+          </a:p>
+          <a:p>
+            <a:pPr>
+              <a:lnSpc>
+                <a:spcPct val="150000"/>
+              </a:lnSpc>
+              <a:buNone/>
+            </a:pPr>
+            <a:r>
+              <a:rPr lang="az-Latn-AZ" altLang="en-US" sz="1300">
+                <a:latin typeface="Arial" panose="020B0604020202020204" pitchFamily="34" charset="0"/>
+              </a:rPr>
+              <a:t>product variantın statusunu dəyişmək üçün yazdığımız js kodu.</a:t>
+            </a:r>
+          </a:p>
+          <a:p>
+            <a:pPr>
+              <a:lnSpc>
+                <a:spcPct val="150000"/>
+              </a:lnSpc>
+              <a:buNone/>
+            </a:pPr>
+            <a:endParaRPr kumimoji="0" lang="az-Latn-AZ" altLang="en-US" sz="1300" b="0" i="0" u="none" strike="noStrike" cap="none" normalizeH="0" baseline="0">
+              <a:ln>
+                <a:noFill/>
+              </a:ln>
+              <a:solidFill>
+                <a:schemeClr val="tx1"/>
+              </a:solidFill>
+              <a:effectLst/>
+              <a:latin typeface="Arial" panose="020B0604020202020204" pitchFamily="34" charset="0"/>
+            </a:endParaRPr>
+          </a:p>
+          <a:p>
+            <a:pPr>
+              <a:lnSpc>
+                <a:spcPct val="150000"/>
+              </a:lnSpc>
+              <a:buNone/>
+            </a:pPr>
+            <a:r>
+              <a:rPr lang="az-Latn-AZ" altLang="en-US" sz="1300">
+                <a:latin typeface="Arial" panose="020B0604020202020204" pitchFamily="34" charset="0"/>
+              </a:rPr>
+              <a:t>Təbii ki, bu kodları əvvəl yazdığımız üçün həmin əvvəl yazdığımız </a:t>
+            </a:r>
+          </a:p>
+          <a:p>
+            <a:pPr>
+              <a:lnSpc>
+                <a:spcPct val="150000"/>
+              </a:lnSpc>
+              <a:buNone/>
+            </a:pPr>
+            <a:r>
+              <a:rPr kumimoji="0" lang="az-Latn-AZ" altLang="en-US" sz="1300" b="0" i="0" u="none" strike="noStrike" cap="none" normalizeH="0" baseline="0">
+                <a:ln>
+                  <a:noFill/>
+                </a:ln>
+                <a:solidFill>
+                  <a:schemeClr val="tx1"/>
+                </a:solidFill>
+                <a:effectLst/>
+                <a:latin typeface="Arial" panose="020B0604020202020204" pitchFamily="34" charset="0"/>
+              </a:rPr>
+              <a:t>fayllardan c</a:t>
+            </a:r>
+            <a:r>
+              <a:rPr lang="az-Latn-AZ" altLang="en-US" sz="1300">
+                <a:latin typeface="Arial" panose="020B0604020202020204" pitchFamily="34" charset="0"/>
+              </a:rPr>
+              <a:t>trl + c və v edə bilərik.</a:t>
+            </a:r>
+            <a:endParaRPr kumimoji="0" lang="en-US" altLang="en-US" sz="1300" b="0" i="0" u="none" strike="noStrike" cap="none" normalizeH="0" baseline="0">
+              <a:ln>
+                <a:noFill/>
+              </a:ln>
+              <a:solidFill>
+                <a:schemeClr val="tx1"/>
+              </a:solidFill>
+              <a:effectLst/>
+              <a:latin typeface="Arial" panose="020B0604020202020204" pitchFamily="34" charset="0"/>
+            </a:endParaRPr>
+          </a:p>
+        </p:txBody>
+      </p:sp>
+      <p:pic>
+        <p:nvPicPr>
+          <p:cNvPr id="4" name="Picture 3">
+            <a:extLst>
+              <a:ext uri="{FF2B5EF4-FFF2-40B4-BE49-F238E27FC236}">
+                <a16:creationId xmlns:a16="http://schemas.microsoft.com/office/drawing/2014/main" id="{4BFF4DFB-1074-D331-C565-D79E3B0FF4DC}"/>
+              </a:ext>
+            </a:extLst>
+          </p:cNvPr>
+          <p:cNvPicPr>
+            <a:picLocks noChangeAspect="1"/>
+          </p:cNvPicPr>
+          <p:nvPr/>
+        </p:nvPicPr>
+        <p:blipFill>
+          <a:blip r:embed="rId2"/>
+          <a:stretch>
+            <a:fillRect/>
+          </a:stretch>
+        </p:blipFill>
+        <p:spPr>
+          <a:xfrm>
+            <a:off x="5324489" y="0"/>
+            <a:ext cx="6867511" cy="6858000"/>
+          </a:xfrm>
+          <a:prstGeom prst="rect">
+            <a:avLst/>
+          </a:prstGeom>
+        </p:spPr>
+      </p:pic>
+    </p:spTree>
+    <p:extLst>
+      <p:ext uri="{BB962C8B-B14F-4D97-AF65-F5344CB8AC3E}">
+        <p14:creationId xmlns:p14="http://schemas.microsoft.com/office/powerpoint/2010/main" val="1979309349"/>
+      </p:ext>
+    </p:extLst>
+  </p:cSld>
+  <p:clrMapOvr>
+    <a:masterClrMapping/>
+  </p:clrMapOvr>
+</p:sld>
+</file>
+
+<file path=ppt/slides/slide7.xml><?xml version="1.0" encoding="utf-8"?>
+<p:sld xmlns:a="http://schemas.openxmlformats.org/drawingml/2006/main" xmlns:r="http://schemas.openxmlformats.org/officeDocument/2006/relationships" xmlns:p="http://schemas.openxmlformats.org/presentationml/2006/main">
+  <p:cSld>
+    <p:spTree>
+      <p:nvGrpSpPr>
+        <p:cNvPr id="1" name="">
+          <a:extLst>
+            <a:ext uri="{FF2B5EF4-FFF2-40B4-BE49-F238E27FC236}">
+              <a16:creationId xmlns:a16="http://schemas.microsoft.com/office/drawing/2014/main" id="{A2FB3985-E4C0-50D3-CA6B-D9B4B6D9F5BC}"/>
+            </a:ext>
+          </a:extLst>
+        </p:cNvPr>
+        <p:cNvGrpSpPr/>
+        <p:nvPr/>
+      </p:nvGrpSpPr>
+      <p:grpSpPr>
+        <a:xfrm>
+          <a:off x="0" y="0"/>
+          <a:ext cx="0" cy="0"/>
+          <a:chOff x="0" y="0"/>
+          <a:chExt cx="0" cy="0"/>
+        </a:xfrm>
+      </p:grpSpPr>
+      <p:sp>
+        <p:nvSpPr>
+          <p:cNvPr id="3" name="TextBox 2">
+            <a:extLst>
+              <a:ext uri="{FF2B5EF4-FFF2-40B4-BE49-F238E27FC236}">
+                <a16:creationId xmlns:a16="http://schemas.microsoft.com/office/drawing/2014/main" id="{86F5985B-487E-9BE4-65D6-4438D9401AF4}"/>
+              </a:ext>
+            </a:extLst>
+          </p:cNvPr>
+          <p:cNvSpPr txBox="1"/>
+          <p:nvPr/>
+        </p:nvSpPr>
+        <p:spPr>
+          <a:xfrm>
+            <a:off x="217714" y="255046"/>
+            <a:ext cx="11756571" cy="355354"/>
+          </a:xfrm>
+          <a:prstGeom prst="rect">
+            <a:avLst/>
+          </a:prstGeom>
+          <a:noFill/>
+        </p:spPr>
+        <p:txBody>
+          <a:bodyPr wrap="square">
+            <a:spAutoFit/>
+          </a:bodyPr>
+          <a:lstStyle/>
+          <a:p>
+            <a:pPr>
+              <a:lnSpc>
+                <a:spcPct val="150000"/>
+              </a:lnSpc>
+              <a:buNone/>
+            </a:pPr>
+            <a:r>
+              <a:rPr lang="en-US" altLang="en-US" sz="1300">
+                <a:latin typeface="Arial" panose="020B0604020202020204" pitchFamily="34" charset="0"/>
+              </a:rPr>
+              <a:t>app\Http\Controllers\Backend\ProductVariantController.php</a:t>
+            </a:r>
+            <a:endParaRPr kumimoji="0" lang="en-US" altLang="en-US" sz="1300" b="0" i="0" u="none" strike="noStrike" cap="none" normalizeH="0" baseline="0">
+              <a:ln>
+                <a:noFill/>
+              </a:ln>
+              <a:solidFill>
+                <a:schemeClr val="tx1"/>
+              </a:solidFill>
+              <a:effectLst/>
+              <a:latin typeface="Arial" panose="020B0604020202020204" pitchFamily="34" charset="0"/>
+            </a:endParaRPr>
+          </a:p>
+        </p:txBody>
+      </p:sp>
+      <p:pic>
+        <p:nvPicPr>
+          <p:cNvPr id="4" name="Picture 3">
+            <a:extLst>
+              <a:ext uri="{FF2B5EF4-FFF2-40B4-BE49-F238E27FC236}">
+                <a16:creationId xmlns:a16="http://schemas.microsoft.com/office/drawing/2014/main" id="{287F3A2E-5FBB-7F54-2EDE-9C81B95634C9}"/>
+              </a:ext>
+            </a:extLst>
+          </p:cNvPr>
+          <p:cNvPicPr>
+            <a:picLocks noChangeAspect="1"/>
+          </p:cNvPicPr>
+          <p:nvPr/>
+        </p:nvPicPr>
+        <p:blipFill>
+          <a:blip r:embed="rId2"/>
+          <a:stretch>
+            <a:fillRect/>
+          </a:stretch>
+        </p:blipFill>
+        <p:spPr>
+          <a:xfrm>
+            <a:off x="6705599" y="0"/>
+            <a:ext cx="5486401" cy="6858000"/>
+          </a:xfrm>
+          <a:prstGeom prst="rect">
+            <a:avLst/>
+          </a:prstGeom>
+        </p:spPr>
+      </p:pic>
+    </p:spTree>
+    <p:extLst>
+      <p:ext uri="{BB962C8B-B14F-4D97-AF65-F5344CB8AC3E}">
+        <p14:creationId xmlns:p14="http://schemas.microsoft.com/office/powerpoint/2010/main" val="959247733"/>
+      </p:ext>
+    </p:extLst>
+  </p:cSld>
+  <p:clrMapOvr>
+    <a:masterClrMapping/>
+  </p:clrMapOvr>
+</p:sld>
+</file>
+
+<file path=ppt/slides/slide8.xml><?xml version="1.0" encoding="utf-8"?>
 <p:sld xmlns:a="http://schemas.openxmlformats.org/drawingml/2006/main" xmlns:r="http://schemas.openxmlformats.org/officeDocument/2006/relationships" xmlns:p="http://schemas.openxmlformats.org/presentationml/2006/main">
   <p:cSld>
     <p:spTree>
@@ -3470,6 +4602,50 @@
           </a:p>
         </p:txBody>
       </p:sp>
+      <p:pic>
+        <p:nvPicPr>
+          <p:cNvPr id="4" name="Picture 3">
+            <a:extLst>
+              <a:ext uri="{FF2B5EF4-FFF2-40B4-BE49-F238E27FC236}">
+                <a16:creationId xmlns:a16="http://schemas.microsoft.com/office/drawing/2014/main" id="{A6FFC9FD-37F1-F393-EE3F-64383C53337E}"/>
+              </a:ext>
+            </a:extLst>
+          </p:cNvPr>
+          <p:cNvPicPr>
+            <a:picLocks noChangeAspect="1"/>
+          </p:cNvPicPr>
+          <p:nvPr/>
+        </p:nvPicPr>
+        <p:blipFill>
+          <a:blip r:embed="rId2"/>
+          <a:stretch>
+            <a:fillRect/>
+          </a:stretch>
+        </p:blipFill>
+        <p:spPr>
+          <a:xfrm>
+            <a:off x="0" y="1751406"/>
+            <a:ext cx="12192000" cy="3355188"/>
+          </a:xfrm>
+          <a:prstGeom prst="rect">
+            <a:avLst/>
+          </a:prstGeom>
+          <a:ln w="38100" cap="sq">
+            <a:solidFill>
+              <a:srgbClr val="000000"/>
+            </a:solidFill>
+            <a:prstDash val="solid"/>
+            <a:miter lim="800000"/>
+          </a:ln>
+          <a:effectLst>
+            <a:outerShdw blurRad="50800" dist="38100" dir="2700000" algn="tl" rotWithShape="0">
+              <a:srgbClr val="000000">
+                <a:alpha val="43000"/>
+              </a:srgbClr>
+            </a:outerShdw>
+          </a:effectLst>
+        </p:spPr>
+      </p:pic>
     </p:spTree>
     <p:extLst>
       <p:ext uri="{BB962C8B-B14F-4D97-AF65-F5344CB8AC3E}">
@@ -3483,7 +4659,7 @@
 </p:sld>
 </file>
 
-<file path=ppt/slides/slide3.xml><?xml version="1.0" encoding="utf-8"?>
+<file path=ppt/slides/slide9.xml><?xml version="1.0" encoding="utf-8"?>
 <p:sld xmlns:a="http://schemas.openxmlformats.org/drawingml/2006/main" xmlns:r="http://schemas.openxmlformats.org/officeDocument/2006/relationships" xmlns:p="http://schemas.openxmlformats.org/presentationml/2006/main">
   <p:cSld>
     <p:spTree>
